--- a/docs/UTAS_SNA_Defense_Presentation.pptx
+++ b/docs/UTAS_SNA_Defense_Presentation.pptx
@@ -23,6 +23,7 @@
     <p:sldId id="271" r:id="rId23"/>
     <p:sldId id="272" r:id="rId24"/>
     <p:sldId id="273" r:id="rId25"/>
+    <p:sldId id="274" r:id="rId26"/>
   </p:sldIdLst>
   <p:sldSz cx="12191695" cy="6858000" type="screen4x3"/>
   <p:notesSz cx="6858000" cy="9144000"/>
@@ -729,7 +730,7 @@
           <a:lstStyle/>
           <a:p>
             <a:r>
-              <a:t>Give the numbers, then hold for the next slide -- the interpretation is the interesting part. Note the religion figure quietly combines 'Muslim' and 'Islam' answers, one more example of the free-text cleaning story.</a:t>
+              <a:t>Lead with the combination: two rounds, one graph, joined by the 15 students who appear in both. Then the headline -- 77 bridge students. If asked why the network still looks sparse, that is the next slide.</a:t>
             </a:r>
           </a:p>
         </p:txBody>
@@ -799,7 +800,7 @@
           <a:lstStyle/>
           <a:p>
             <a:r>
-              <a:t>Be upfront: the method works, the data is thin. That honesty is defensible and expected. The system computed exactly what the data supports, flagged its own sparsity in the built-in expert advice, and the second campus-wide survey round is the designed answer to it.</a:t>
+              <a:t>The honest framing: the structure the system found is real and useful, and the thinness is a property of how much each respondent was asked to give. If a panel member presses on sparsity, agree with them and point to the survey instrument as the lever.</a:t>
             </a:r>
           </a:p>
         </p:txBody>
@@ -869,7 +870,7 @@
           <a:lstStyle/>
           <a:p>
             <a:r>
-              <a:t>This is the decision-support layer -- the difference between a dashboard and a tool. The expert advisor is a classic knowledge-driven DSS: explicit rules over the computed metrics, so its advice is explainable to a non-technical organiser.</a:t>
+              <a:t>This slide is optional if time is short, but it answers 'how do you know your system is correct?' better than any assurance could. It shows a real defect, found by verification rather than luck, and corrected -- which is what a panel wants to see from an engineer.</a:t>
             </a:r>
           </a:p>
         </p:txBody>
@@ -939,7 +940,7 @@
           <a:lstStyle/>
           <a:p>
             <a:r>
-              <a:t>Two proof points: it is deployed (usable from any phone or laptop right now, no setup) and it is tested (57 automated tests run against every change). Offer the live demo here if the panel wants it.</a:t>
+              <a:t>This is the decision-support layer -- the difference between a dashboard and a tool. The expert advisor is a classic knowledge-driven DSS: explicit rules over the computed metrics, so its advice is explainable to a non-technical organiser.</a:t>
             </a:r>
           </a:p>
         </p:txBody>
@@ -1009,7 +1010,7 @@
           <a:lstStyle/>
           <a:p>
             <a:r>
-              <a:t>Name the limitations before the panel does. Each one has a designed answer: more data, a directed model, a recomputation pipeline, and the predictive layer Liu et al. demonstrated. Anonymisation is an ethics point worth raising yourself -- it shows awareness, not weakness.</a:t>
+              <a:t>Two proof points: it is deployed (usable from any phone or laptop right now, no setup) and it is tested (78 automated tests run against every change). Offer the live demo here if the panel wants it.</a:t>
             </a:r>
           </a:p>
         </p:txBody>
@@ -1079,7 +1080,7 @@
           <a:lstStyle/>
           <a:p>
             <a:r>
-              <a:t>Close the loop with the opening: campaigns were planned blind; now there is a live tool that maps the network, measures influence, and hands organisers a named plan. Thank the supervisor and panel and invite questions.</a:t>
+              <a:t>Name the limitations before the panel does. Each one has a designed answer: more data, a directed model, a recomputation pipeline, and the predictive layer Liu et al. demonstrated. Anonymisation is an ethics point worth raising yourself -- it shows awareness, not weakness.</a:t>
             </a:r>
           </a:p>
         </p:txBody>
@@ -1105,6 +1106,76 @@
 </file>
 
 <file path=ppt/notesSlides/notesSlide18.xml><?xml version="1.0" encoding="utf-8"?>
+<p:notes xmlns:a="http://schemas.openxmlformats.org/drawingml/2006/main" xmlns:p="http://schemas.openxmlformats.org/presentationml/2006/main" xmlns:r="http://schemas.openxmlformats.org/officeDocument/2006/relationships">
+  <p:cSld>
+    <p:spTree>
+      <p:nvGrpSpPr>
+        <p:cNvPr id="1" name=""/>
+        <p:cNvGrpSpPr/>
+        <p:nvPr/>
+      </p:nvGrpSpPr>
+      <p:grpSpPr>
+        <a:xfrm>
+          <a:off x="0" y="0"/>
+          <a:ext cx="0" cy="0"/>
+          <a:chOff x="0" y="0"/>
+          <a:chExt cx="0" cy="0"/>
+        </a:xfrm>
+      </p:grpSpPr>
+      <p:sp>
+        <p:nvSpPr>
+          <p:cNvPr id="2" name="Slide Image Placeholder 1"/>
+          <p:cNvSpPr>
+            <a:spLocks noGrp="1"/>
+          </p:cNvSpPr>
+          <p:nvPr>
+            <p:ph type="sldImg" idx="2"/>
+          </p:nvPr>
+        </p:nvSpPr>
+        <p:spPr/>
+      </p:sp>
+      <p:sp>
+        <p:nvSpPr>
+          <p:cNvPr id="3" name="Notes Placeholder 2"/>
+          <p:cNvSpPr>
+            <a:spLocks noGrp="1"/>
+          </p:cNvSpPr>
+          <p:nvPr>
+            <p:ph type="body" idx="3" sz="quarter"/>
+          </p:nvPr>
+        </p:nvSpPr>
+        <p:spPr/>
+        <p:txBody>
+          <a:bodyPr/>
+          <a:lstStyle/>
+          <a:p>
+            <a:r>
+              <a:t>Close the loop with the opening: campaigns were planned blind; now there is a live tool that maps the network, measures influence, and hands organisers a named plan. Thank the supervisor and panel and invite questions.</a:t>
+            </a:r>
+          </a:p>
+        </p:txBody>
+      </p:sp>
+      <p:sp>
+        <p:nvSpPr>
+          <p:cNvPr id="4" name="Slide Number Placeholder 3"/>
+          <p:cNvSpPr>
+            <a:spLocks noGrp="1"/>
+          </p:cNvSpPr>
+          <p:nvPr>
+            <p:ph type="sldNum" idx="5" sz="quarter"/>
+          </p:nvPr>
+        </p:nvSpPr>
+        <p:spPr/>
+      </p:sp>
+    </p:spTree>
+  </p:cSld>
+  <p:clrMapOvr>
+    <a:masterClrMapping/>
+  </p:clrMapOvr>
+</p:notes>
+</file>
+
+<file path=ppt/notesSlides/notesSlide19.xml><?xml version="1.0" encoding="utf-8"?>
 <p:notes xmlns:a="http://schemas.openxmlformats.org/drawingml/2006/main" xmlns:p="http://schemas.openxmlformats.org/presentationml/2006/main" xmlns:r="http://schemas.openxmlformats.org/officeDocument/2006/relationships">
   <p:cSld>
     <p:spTree>
@@ -5184,7 +5255,7 @@
                   <a:srgbClr val="1E3A8A"/>
                 </a:solidFill>
               </a:rPr>
-              <a:t>331 students, 197 friendship connections  </a:t>
+              <a:t>Two survey rounds combined:  </a:t>
             </a:r>
             <a:r>
               <a:rPr sz="1900">
@@ -5192,7 +5263,7 @@
                   <a:srgbClr val="111827"/>
                 </a:solidFill>
               </a:rPr>
-              <a:t>collected and analysed (after cleaning).</a:t>
+              <a:t>a class cohort, then a campus-wide round -- 717 students and 408 friendships in one graph.</a:t>
             </a:r>
           </a:p>
           <a:p>
@@ -5207,7 +5278,7 @@
                   <a:srgbClr val="1E3A8A"/>
                 </a:solidFill>
               </a:rPr>
-              <a:t>140 communities detected;  </a:t>
+              <a:t>15 students appeared in both rounds  </a:t>
             </a:r>
             <a:r>
               <a:rPr sz="1900">
@@ -5215,7 +5286,7 @@
                   <a:srgbClr val="111827"/>
                 </a:solidFill>
               </a:rPr>
-              <a:t>the largest has only 6 students.</a:t>
+              <a:t>and became single nodes, joining the two datasets instead of leaving them as separate islands.</a:t>
             </a:r>
           </a:p>
           <a:p>
@@ -5230,7 +5301,7 @@
                   <a:srgbClr val="1E3A8A"/>
                 </a:solidFill>
               </a:rPr>
-              <a:t>Influence tiers:  </a:t>
+              <a:t>77 bridge students identified  </a:t>
             </a:r>
             <a:r>
               <a:rPr sz="1900">
@@ -5238,7 +5309,7 @@
                   <a:srgbClr val="111827"/>
                 </a:solidFill>
               </a:rPr>
-              <a:t>33 High, 67 Medium, 231 Low.</a:t>
+              <a:t>-- each one a cut vertex whose removal would break the network into more pieces.</a:t>
             </a:r>
           </a:p>
           <a:p>
@@ -5253,7 +5324,7 @@
                   <a:srgbClr val="1E3A8A"/>
                 </a:solidFill>
               </a:rPr>
-              <a:t>0 bridge nodes  </a:t>
+              <a:t>Influence tiers:  </a:t>
             </a:r>
             <a:r>
               <a:rPr sz="1900">
@@ -5261,7 +5332,7 @@
                   <a:srgbClr val="111827"/>
                 </a:solidFill>
               </a:rPr>
-              <a:t>-- no single student currently connects otherwise-separate components.</a:t>
+              <a:t>72 High, 143 Medium, 502 Low.</a:t>
             </a:r>
           </a:p>
           <a:p>
@@ -5276,7 +5347,7 @@
                   <a:srgbClr val="1E3A8A"/>
                 </a:solidFill>
               </a:rPr>
-              <a:t>Cohort shape:  </a:t>
+              <a:t>315 communities;  </a:t>
             </a:r>
             <a:r>
               <a:rPr sz="1900">
@@ -5284,7 +5355,7 @@
                   <a:srgbClr val="111827"/>
                 </a:solidFill>
               </a:rPr>
-              <a:t>85% male; IT (132) and Computer Science (104) dominate; 174 Christian, 151 Muslim respondents.</a:t>
+              <a:t>the largest holds 8 students. Density 0.0016, avg 1.14 friends each.</a:t>
             </a:r>
           </a:p>
           <a:p>
@@ -5299,7 +5370,7 @@
                   <a:srgbClr val="1E3A8A"/>
                 </a:solidFill>
               </a:rPr>
-              <a:t>Top departments:  </a:t>
+              <a:t>Cohort shape:  </a:t>
             </a:r>
             <a:r>
               <a:rPr sz="1900">
@@ -5307,7 +5378,7 @@
                   <a:srgbClr val="111827"/>
                 </a:solidFill>
               </a:rPr>
-              <a:t>IT, Computer Science, Computing with Accounting, B.Ed Mathematics.</a:t>
+              <a:t>IT (184) and Computer Science (164) lead, then Nursing (77); 205 TEIN and 93 TESCON.</a:t>
             </a:r>
           </a:p>
         </p:txBody>
@@ -5415,7 +5486,7 @@
                   <a:srgbClr val="1E3A8A"/>
                 </a:solidFill>
               </a:rPr>
-              <a:t>The network is genuinely sparse.  </a:t>
+              <a:t>77 bridges is the finding that matters:  </a:t>
             </a:r>
             <a:r>
               <a:rPr sz="1900">
@@ -5423,7 +5494,7 @@
                   <a:srgbClr val="111827"/>
                 </a:solidFill>
               </a:rPr>
-              <a:t>197 edges across 331 students is far below one friend named per student; most respondents named one or two.</a:t>
+              <a:t>these are named students a campaign could not have identified any other way -- the structural form of Granovetter's weak ties.</a:t>
             </a:r>
           </a:p>
           <a:p>
@@ -5438,7 +5509,7 @@
                   <a:srgbClr val="1E3A8A"/>
                 </a:solidFill>
               </a:rPr>
-              <a:t>Fragmentation, not cliques:  </a:t>
+              <a:t>Bridges span programmes:  </a:t>
             </a:r>
             <a:r>
               <a:rPr sz="1900">
@@ -5446,7 +5517,7 @@
                   <a:srgbClr val="111827"/>
                 </a:solidFill>
               </a:rPr>
-              <a:t>140 tiny communities means the survey captured islands of friendship, not yet the bridges between them.</a:t>
+              <a:t>Computer Science, IT and Computing with Accounting, not concentrated among the most-connected few -- exactly Borgatti's (2006) point that seeding is not the same as ranking by centrality.</a:t>
             </a:r>
           </a:p>
           <a:p>
@@ -5461,7 +5532,7 @@
                   <a:srgbClr val="1E3A8A"/>
                 </a:solidFill>
               </a:rPr>
-              <a:t>Zero bridge nodes is a finding, not a failure:  </a:t>
+              <a:t>The network is still sparse, and that is a survey artefact:  </a:t>
             </a:r>
             <a:r>
               <a:rPr sz="1900">
@@ -5469,7 +5540,7 @@
                   <a:srgbClr val="111827"/>
                 </a:solidFill>
               </a:rPr>
-              <a:t>with this coverage, no student yet links separate components -- more data will surface them.</a:t>
+              <a:t>most respondents named one friend, so density is 0.0016 and 315 communities stay small.</a:t>
             </a:r>
           </a:p>
           <a:p>
@@ -5484,7 +5555,7 @@
                   <a:srgbClr val="1E3A8A"/>
                 </a:solidFill>
               </a:rPr>
-              <a:t>Influence is already measurable:  </a:t>
+              <a:t>Clustering is zero  </a:t>
             </a:r>
             <a:r>
               <a:rPr sz="1900">
@@ -5492,7 +5563,7 @@
                   <a:srgbClr val="111827"/>
                 </a:solidFill>
               </a:rPr>
-              <a:t>even in a sparse graph, 33 students clearly stand out as locally central -- real, named outreach targets.</a:t>
+              <a:t>because friends-of-friends were never named -- not because UTAS students lack mutual circles.</a:t>
             </a:r>
           </a:p>
           <a:p>
@@ -5507,7 +5578,7 @@
                   <a:srgbClr val="1E3A8A"/>
                 </a:solidFill>
               </a:rPr>
-              <a:t>Direct implication:  </a:t>
+              <a:t>The fix is in survey design, not the method:  </a:t>
             </a:r>
             <a:r>
               <a:rPr sz="1900">
@@ -5515,7 +5586,7 @@
                   <a:srgbClr val="111827"/>
                 </a:solidFill>
               </a:rPr>
-              <a:t>the campus-wide collection round now under way should densify the graph and unlock bridge-node and cross-community analysis.</a:t>
+              <a:t>asking each respondent for 3-5 friends would change what the analysis can see, at no extra cost.</a:t>
             </a:r>
           </a:p>
         </p:txBody>
@@ -5585,7 +5656,7 @@
               </a:defRPr>
             </a:pPr>
             <a:r>
-              <a:t>From Analysis to Action</a:t>
+              <a:t>A Result Worth Checking Twice</a:t>
             </a:r>
           </a:p>
         </p:txBody>
@@ -5623,7 +5694,7 @@
                   <a:srgbClr val="1E3A8A"/>
                 </a:solidFill>
               </a:rPr>
-              <a:t>One-click campaign plan:  </a:t>
+              <a:t>For most of the project the system reported 0 bridge nodes.  </a:t>
             </a:r>
             <a:r>
               <a:rPr sz="1900">
@@ -5631,7 +5702,7 @@
                   <a:srgbClr val="111827"/>
                 </a:solidFill>
               </a:rPr>
-              <a:t>reads the live analysis and creates a campaign with a concrete, named outreach plan -- top influencers to engage, coverage gaps to fill.</a:t>
+              <a:t>That looked entirely plausible -- a sparse network with no cut vertices is a believable result.</a:t>
             </a:r>
           </a:p>
           <a:p>
@@ -5646,7 +5717,7 @@
                   <a:srgbClr val="1E3A8A"/>
                 </a:solidFill>
               </a:rPr>
-              <a:t>Recommendations per campaign:  </a:t>
+              <a:t>It was a defect.  </a:t>
             </a:r>
             <a:r>
               <a:rPr sz="1900">
@@ -5654,7 +5725,7 @@
                   <a:srgbClr val="111827"/>
                 </a:solidFill>
               </a:rPr>
-              <a:t>top influencers and bridge students, filtered to the campaign's target party.</a:t>
+              <a:t>Bridges were sought among students whose neighbours spanned two or more Louvain communities. But Louvain gives every disconnected component its own community, so on fragmented survey data no student could ever satisfy that test.</a:t>
             </a:r>
           </a:p>
           <a:p>
@@ -5669,7 +5740,7 @@
                   <a:srgbClr val="1E3A8A"/>
                 </a:solidFill>
               </a:rPr>
-              <a:t>Expert advice:  </a:t>
+              <a:t>Found by cross-checking, not by inspection:  </a:t>
             </a:r>
             <a:r>
               <a:rPr sz="1900">
@@ -5677,7 +5748,7 @@
                   <a:srgbClr val="111827"/>
                 </a:solidFill>
               </a:rPr>
-              <a:t>a rule-based advisor interprets the metrics in plain language -- e.g. flagging network sparsity and suggesting what to collect next.</a:t>
+              <a:t>comparing the system's output against an independent calculation of the graph's articulation points, which found 77 in the same data.</a:t>
             </a:r>
           </a:p>
           <a:p>
@@ -5692,7 +5763,7 @@
                   <a:srgbClr val="1E3A8A"/>
                 </a:solidFill>
               </a:rPr>
-              <a:t>Why it matters:  </a:t>
+              <a:t>The lesson:  </a:t>
             </a:r>
             <a:r>
               <a:rPr sz="1900">
@@ -5700,7 +5771,7 @@
                   <a:srgbClr val="111827"/>
                 </a:solidFill>
               </a:rPr>
-              <a:t>the output is an action list with names, not a table of numbers.</a:t>
+              <a:t>a plausible-looking number is not evidence of a correct one. Every reported figure should be verified against an independent method.</a:t>
             </a:r>
           </a:p>
         </p:txBody>
@@ -5770,7 +5841,7 @@
               </a:defRPr>
             </a:pPr>
             <a:r>
-              <a:t>Deployment &amp; Quality</a:t>
+              <a:t>From Analysis to Action</a:t>
             </a:r>
           </a:p>
         </p:txBody>
@@ -5808,7 +5879,7 @@
                   <a:srgbClr val="1E3A8A"/>
                 </a:solidFill>
               </a:rPr>
-              <a:t>Live on the internet:  </a:t>
+              <a:t>One-click campaign plan:  </a:t>
             </a:r>
             <a:r>
               <a:rPr sz="1900">
@@ -5816,7 +5887,7 @@
                   <a:srgbClr val="111827"/>
                 </a:solidFill>
               </a:rPr>
-              <a:t>frontend on Firebase Hosting, backend on PythonAnywhere -- myapplication-65e7d8b9.web.app</a:t>
+              <a:t>reads the live analysis and creates a campaign with a concrete, named outreach plan -- top influencers to engage, coverage gaps to fill.</a:t>
             </a:r>
           </a:p>
           <a:p>
@@ -5831,7 +5902,7 @@
                   <a:srgbClr val="1E3A8A"/>
                 </a:solidFill>
               </a:rPr>
-              <a:t>Free-tier hosting throughout:  </a:t>
+              <a:t>Recommendations per campaign:  </a:t>
             </a:r>
             <a:r>
               <a:rPr sz="1900">
@@ -5839,7 +5910,7 @@
                   <a:srgbClr val="111827"/>
                 </a:solidFill>
               </a:rPr>
-              <a:t>no running cost, so the system outlives the assessment period.</a:t>
+              <a:t>top influencers and bridge students, filtered to the campaign's target party.</a:t>
             </a:r>
           </a:p>
           <a:p>
@@ -5854,7 +5925,7 @@
                   <a:srgbClr val="1E3A8A"/>
                 </a:solidFill>
               </a:rPr>
-              <a:t>57 automated backend tests:  </a:t>
+              <a:t>Expert advice:  </a:t>
             </a:r>
             <a:r>
               <a:rPr sz="1900">
@@ -5862,7 +5933,7 @@
                   <a:srgbClr val="111827"/>
                 </a:solidFill>
               </a:rPr>
-              <a:t>auth, students, connections, campaigns, analysis endpoints, and the survey importer.</a:t>
+              <a:t>a rule-based advisor interprets the metrics in plain language -- e.g. flagging network sparsity and suggesting what to collect next.</a:t>
             </a:r>
           </a:p>
           <a:p>
@@ -5877,7 +5948,7 @@
                   <a:srgbClr val="1E3A8A"/>
                 </a:solidFill>
               </a:rPr>
-              <a:t>Role-based security:  </a:t>
+              <a:t>Why it matters:  </a:t>
             </a:r>
             <a:r>
               <a:rPr sz="1900">
@@ -5885,30 +5956,7 @@
                   <a:srgbClr val="111827"/>
                 </a:solidFill>
               </a:rPr>
-              <a:t>every restriction enforced in the API, not just hidden in the interface.</a:t>
-            </a:r>
-          </a:p>
-          <a:p>
-            <a:pPr>
-              <a:spcAft>
-                <a:spcPts val="1400"/>
-              </a:spcAft>
-            </a:pPr>
-            <a:r>
-              <a:rPr b="1" sz="1900">
-                <a:solidFill>
-                  <a:srgbClr val="1E3A8A"/>
-                </a:solidFill>
-              </a:rPr>
-              <a:t>Google Sign-In  </a:t>
-            </a:r>
-            <a:r>
-              <a:rPr sz="1900">
-                <a:solidFill>
-                  <a:srgbClr val="111827"/>
-                </a:solidFill>
-              </a:rPr>
-              <a:t>alongside username/password authentication.</a:t>
+              <a:t>the output is an action list with names, not a table of numbers.</a:t>
             </a:r>
           </a:p>
         </p:txBody>
@@ -5978,7 +6026,7 @@
               </a:defRPr>
             </a:pPr>
             <a:r>
-              <a:t>Limitations &amp; Future Work</a:t>
+              <a:t>Deployment &amp; Quality</a:t>
             </a:r>
           </a:p>
         </p:txBody>
@@ -6016,7 +6064,7 @@
                   <a:srgbClr val="1E3A8A"/>
                 </a:solidFill>
               </a:rPr>
-              <a:t>Data sparsity:  </a:t>
+              <a:t>Live on the internet:  </a:t>
             </a:r>
             <a:r>
               <a:rPr sz="1900">
@@ -6024,7 +6072,7 @@
                   <a:srgbClr val="111827"/>
                 </a:solidFill>
               </a:rPr>
-              <a:t>results are bounded by survey coverage; the campus-wide round is collecting more.</a:t>
+              <a:t>frontend on Firebase Hosting, backend on PythonAnywhere -- myapplication-65e7d8b9.web.app</a:t>
             </a:r>
           </a:p>
           <a:p>
@@ -6039,7 +6087,7 @@
                   <a:srgbClr val="1E3A8A"/>
                 </a:solidFill>
               </a:rPr>
-              <a:t>Undirected graph only:  </a:t>
+              <a:t>Free-tier hosting throughout:  </a:t>
             </a:r>
             <a:r>
               <a:rPr sz="1900">
@@ -6047,7 +6095,7 @@
                   <a:srgbClr val="111827"/>
                 </a:solidFill>
               </a:rPr>
-              <a:t>mutual friendship; directional ties would need different centrality measures.</a:t>
+              <a:t>no running cost, so the system outlives the assessment period.</a:t>
             </a:r>
           </a:p>
           <a:p>
@@ -6062,7 +6110,7 @@
                   <a:srgbClr val="1E3A8A"/>
                 </a:solidFill>
               </a:rPr>
-              <a:t>Batch analysis, not real-time:  </a:t>
+              <a:t>78 automated backend tests:  </a:t>
             </a:r>
             <a:r>
               <a:rPr sz="1900">
@@ -6070,7 +6118,7 @@
                   <a:srgbClr val="111827"/>
                 </a:solidFill>
               </a:rPr>
-              <a:t>on-demand recomputation; a live pipeline is future work.</a:t>
+              <a:t>auth, students, connections, campaigns, analysis endpoints, and the survey importer.</a:t>
             </a:r>
           </a:p>
           <a:p>
@@ -6085,7 +6133,7 @@
                   <a:srgbClr val="1E3A8A"/>
                 </a:solidFill>
               </a:rPr>
-              <a:t>No sentiment or prediction yet:  </a:t>
+              <a:t>Role-based security:  </a:t>
             </a:r>
             <a:r>
               <a:rPr sz="1900">
@@ -6093,7 +6141,7 @@
                   <a:srgbClr val="111827"/>
                 </a:solidFill>
               </a:rPr>
-              <a:t>the literature points to both as natural next layers.</a:t>
+              <a:t>every restriction enforced in the API, not just hidden in the interface.</a:t>
             </a:r>
           </a:p>
           <a:p>
@@ -6108,7 +6156,7 @@
                   <a:srgbClr val="1E3A8A"/>
                 </a:solidFill>
               </a:rPr>
-              <a:t>Anonymisation:  </a:t>
+              <a:t>Google Sign-In  </a:t>
             </a:r>
             <a:r>
               <a:rPr sz="1900">
@@ -6116,7 +6164,7 @@
                   <a:srgbClr val="111827"/>
                 </a:solidFill>
               </a:rPr>
-              <a:t>a built-in redaction step for real names/emails is the first thing to add next.</a:t>
+              <a:t>alongside username/password authentication.</a:t>
             </a:r>
           </a:p>
         </p:txBody>
@@ -6186,7 +6234,7 @@
               </a:defRPr>
             </a:pPr>
             <a:r>
-              <a:t>Conclusion</a:t>
+              <a:t>Limitations &amp; Future Work</a:t>
             </a:r>
           </a:p>
         </p:txBody>
@@ -6224,7 +6272,7 @@
                   <a:srgbClr val="1E3A8A"/>
                 </a:solidFill>
               </a:rPr>
-              <a:t>All four objectives met:  </a:t>
+              <a:t>Data sparsity:  </a:t>
             </a:r>
             <a:r>
               <a:rPr sz="1900">
@@ -6232,7 +6280,7 @@
                   <a:srgbClr val="111827"/>
                 </a:solidFill>
               </a:rPr>
-              <a:t>data pipeline, full SNA engine, role-based interface, campaign planner.</a:t>
+              <a:t>most respondents named one friend, so density stays low; asking for 3-5 each is the single highest-value change to a future round.</a:t>
             </a:r>
           </a:p>
           <a:p>
@@ -6247,7 +6295,7 @@
                   <a:srgbClr val="1E3A8A"/>
                 </a:solidFill>
               </a:rPr>
-              <a:t>Real primary data,  </a:t>
+              <a:t>Undirected graph only:  </a:t>
             </a:r>
             <a:r>
               <a:rPr sz="1900">
@@ -6255,7 +6303,7 @@
                   <a:srgbClr val="111827"/>
                 </a:solidFill>
               </a:rPr>
-              <a:t>collected by consent through Google Forms and cleaned for analysis.</a:t>
+              <a:t>mutual friendship; directional ties would need different centrality measures.</a:t>
             </a:r>
           </a:p>
           <a:p>
@@ -6270,7 +6318,7 @@
                   <a:srgbClr val="1E3A8A"/>
                 </a:solidFill>
               </a:rPr>
-              <a:t>A working, deployed, tested system  </a:t>
+              <a:t>Batch analysis, not real-time:  </a:t>
             </a:r>
             <a:r>
               <a:rPr sz="1900">
@@ -6278,7 +6326,7 @@
                   <a:srgbClr val="111827"/>
                 </a:solidFill>
               </a:rPr>
-              <a:t>-- not a prototype or a mock-up.</a:t>
+              <a:t>on-demand recomputation; a live pipeline is future work.</a:t>
             </a:r>
           </a:p>
           <a:p>
@@ -6293,7 +6341,7 @@
                   <a:srgbClr val="1E3A8A"/>
                 </a:solidFill>
               </a:rPr>
-              <a:t>Replaces guesswork  </a:t>
+              <a:t>No sentiment or prediction yet:  </a:t>
             </a:r>
             <a:r>
               <a:rPr sz="1900">
@@ -6301,7 +6349,30 @@
                   <a:srgbClr val="111827"/>
                 </a:solidFill>
               </a:rPr>
-              <a:t>with evidence about who to approach and where the coverage gaps are.</a:t>
+              <a:t>the literature points to both as natural next layers.</a:t>
+            </a:r>
+          </a:p>
+          <a:p>
+            <a:pPr>
+              <a:spcAft>
+                <a:spcPts val="1400"/>
+              </a:spcAft>
+            </a:pPr>
+            <a:r>
+              <a:rPr b="1" sz="1900">
+                <a:solidFill>
+                  <a:srgbClr val="1E3A8A"/>
+                </a:solidFill>
+              </a:rPr>
+              <a:t>Anonymisation:  </a:t>
+            </a:r>
+            <a:r>
+              <a:rPr sz="1900">
+                <a:solidFill>
+                  <a:srgbClr val="111827"/>
+                </a:solidFill>
+              </a:rPr>
+              <a:t>a built-in redaction step for real names/emails is the first thing to add next.</a:t>
             </a:r>
           </a:p>
         </p:txBody>
@@ -6315,6 +6386,191 @@
 </file>
 
 <file path=ppt/slides/slide18.xml><?xml version="1.0" encoding="utf-8"?>
+<p:sld xmlns:a="http://schemas.openxmlformats.org/drawingml/2006/main" xmlns:p="http://schemas.openxmlformats.org/presentationml/2006/main" xmlns:r="http://schemas.openxmlformats.org/officeDocument/2006/relationships">
+  <p:cSld>
+    <p:spTree>
+      <p:nvGrpSpPr>
+        <p:cNvPr id="1" name=""/>
+        <p:cNvGrpSpPr/>
+        <p:nvPr/>
+      </p:nvGrpSpPr>
+      <p:grpSpPr/>
+      <p:sp>
+        <p:nvSpPr>
+          <p:cNvPr id="2" name="Rectangle 1"/>
+          <p:cNvSpPr/>
+          <p:nvPr/>
+        </p:nvSpPr>
+        <p:spPr>
+          <a:xfrm>
+            <a:off x="0" y="0"/>
+            <a:ext cx="12191695" cy="960120"/>
+          </a:xfrm>
+          <a:prstGeom prst="rect">
+            <a:avLst/>
+          </a:prstGeom>
+          <a:solidFill>
+            <a:srgbClr val="1E3A8A"/>
+          </a:solidFill>
+          <a:ln>
+            <a:noFill/>
+          </a:ln>
+        </p:spPr>
+        <p:style>
+          <a:lnRef idx="1">
+            <a:schemeClr val="accent1"/>
+          </a:lnRef>
+          <a:fillRef idx="3">
+            <a:schemeClr val="accent1"/>
+          </a:fillRef>
+          <a:effectRef idx="2">
+            <a:schemeClr val="accent1"/>
+          </a:effectRef>
+          <a:fontRef idx="minor">
+            <a:schemeClr val="lt1"/>
+          </a:fontRef>
+        </p:style>
+        <p:txBody>
+          <a:bodyPr rtlCol="0" anchor="ctr" lIns="457200" tIns="164592"/>
+          <a:lstStyle/>
+          <a:p>
+            <a:pPr algn="ctr">
+              <a:defRPr sz="3000" b="1">
+                <a:solidFill>
+                  <a:srgbClr val="FFFFFF"/>
+                </a:solidFill>
+              </a:defRPr>
+            </a:pPr>
+            <a:r>
+              <a:t>Conclusion</a:t>
+            </a:r>
+          </a:p>
+        </p:txBody>
+      </p:sp>
+      <p:sp>
+        <p:nvSpPr>
+          <p:cNvPr id="3" name="TextBox 2"/>
+          <p:cNvSpPr txBox="1"/>
+          <p:nvPr/>
+        </p:nvSpPr>
+        <p:spPr>
+          <a:xfrm>
+            <a:off x="502920" y="1325880"/>
+            <a:ext cx="11155680" cy="5120640"/>
+          </a:xfrm>
+          <a:prstGeom prst="rect">
+            <a:avLst/>
+          </a:prstGeom>
+          <a:noFill/>
+        </p:spPr>
+        <p:txBody>
+          <a:bodyPr wrap="square">
+            <a:spAutoFit/>
+          </a:bodyPr>
+          <a:lstStyle/>
+          <a:p>
+            <a:pPr>
+              <a:spcAft>
+                <a:spcPts val="1400"/>
+              </a:spcAft>
+            </a:pPr>
+            <a:r>
+              <a:rPr b="1" sz="1900">
+                <a:solidFill>
+                  <a:srgbClr val="1E3A8A"/>
+                </a:solidFill>
+              </a:rPr>
+              <a:t>All four objectives met:  </a:t>
+            </a:r>
+            <a:r>
+              <a:rPr sz="1900">
+                <a:solidFill>
+                  <a:srgbClr val="111827"/>
+                </a:solidFill>
+              </a:rPr>
+              <a:t>data pipeline, full SNA engine, role-based interface, campaign planner.</a:t>
+            </a:r>
+          </a:p>
+          <a:p>
+            <a:pPr>
+              <a:spcAft>
+                <a:spcPts val="1400"/>
+              </a:spcAft>
+            </a:pPr>
+            <a:r>
+              <a:rPr b="1" sz="1900">
+                <a:solidFill>
+                  <a:srgbClr val="1E3A8A"/>
+                </a:solidFill>
+              </a:rPr>
+              <a:t>Real primary data,  </a:t>
+            </a:r>
+            <a:r>
+              <a:rPr sz="1900">
+                <a:solidFill>
+                  <a:srgbClr val="111827"/>
+                </a:solidFill>
+              </a:rPr>
+              <a:t>collected by consent through Google Forms and cleaned for analysis.</a:t>
+            </a:r>
+          </a:p>
+          <a:p>
+            <a:pPr>
+              <a:spcAft>
+                <a:spcPts val="1400"/>
+              </a:spcAft>
+            </a:pPr>
+            <a:r>
+              <a:rPr b="1" sz="1900">
+                <a:solidFill>
+                  <a:srgbClr val="1E3A8A"/>
+                </a:solidFill>
+              </a:rPr>
+              <a:t>A working, deployed, tested system  </a:t>
+            </a:r>
+            <a:r>
+              <a:rPr sz="1900">
+                <a:solidFill>
+                  <a:srgbClr val="111827"/>
+                </a:solidFill>
+              </a:rPr>
+              <a:t>-- not a prototype or a mock-up.</a:t>
+            </a:r>
+          </a:p>
+          <a:p>
+            <a:pPr>
+              <a:spcAft>
+                <a:spcPts val="1400"/>
+              </a:spcAft>
+            </a:pPr>
+            <a:r>
+              <a:rPr b="1" sz="1900">
+                <a:solidFill>
+                  <a:srgbClr val="1E3A8A"/>
+                </a:solidFill>
+              </a:rPr>
+              <a:t>Replaces guesswork  </a:t>
+            </a:r>
+            <a:r>
+              <a:rPr sz="1900">
+                <a:solidFill>
+                  <a:srgbClr val="111827"/>
+                </a:solidFill>
+              </a:rPr>
+              <a:t>with evidence about who to approach and where the coverage gaps are.</a:t>
+            </a:r>
+          </a:p>
+        </p:txBody>
+      </p:sp>
+    </p:spTree>
+  </p:cSld>
+  <p:clrMapOvr>
+    <a:masterClrMapping/>
+  </p:clrMapOvr>
+</p:sld>
+</file>
+
+<file path=ppt/slides/slide19.xml><?xml version="1.0" encoding="utf-8"?>
 <p:sld xmlns:a="http://schemas.openxmlformats.org/drawingml/2006/main" xmlns:p="http://schemas.openxmlformats.org/presentationml/2006/main" xmlns:r="http://schemas.openxmlformats.org/officeDocument/2006/relationships">
   <p:cSld>
     <p:spTree>
@@ -7457,7 +7713,7 @@
                   <a:srgbClr val="111827"/>
                 </a:solidFill>
               </a:rPr>
-              <a:t>57 automated backend tests; TypeScript checks; live verification</a:t>
+              <a:t>78 automated backend tests; TypeScript checks; live verification</a:t>
             </a:r>
           </a:p>
         </p:txBody>
